--- a/Microservices/05.10. Prometheus.pptx
+++ b/Microservices/05.10. Prometheus.pptx
@@ -5,7 +5,7 @@
     <p:sldMasterId id="2147483708" r:id="rId1"/>
   </p:sldMasterIdLst>
   <p:notesMasterIdLst>
-    <p:notesMasterId r:id="rId65"/>
+    <p:notesMasterId r:id="rId67"/>
   </p:notesMasterIdLst>
   <p:sldIdLst>
     <p:sldId id="670" r:id="rId2"/>
@@ -70,7 +70,9 @@
     <p:sldId id="709" r:id="rId61"/>
     <p:sldId id="691" r:id="rId62"/>
     <p:sldId id="690" r:id="rId63"/>
-    <p:sldId id="516" r:id="rId64"/>
+    <p:sldId id="745" r:id="rId64"/>
+    <p:sldId id="746" r:id="rId65"/>
+    <p:sldId id="516" r:id="rId66"/>
   </p:sldIdLst>
   <p:sldSz cx="9144000" cy="6858000" type="screen4x3"/>
   <p:notesSz cx="6858000" cy="9144000"/>
@@ -285,7 +287,7 @@
             <a:fld id="{2F0940CE-BE1D-4C40-AF8B-3898A4D1F5EC}" type="datetimeFigureOut">
               <a:rPr lang="en-US" smtClean="0"/>
               <a:pPr/>
-              <a:t>1/1/2026</a:t>
+              <a:t>8/6/2026</a:t>
             </a:fld>
             <a:endParaRPr lang="en-US"/>
           </a:p>
@@ -824,7 +826,7 @@
               <a:pPr>
                 <a:defRPr/>
               </a:pPr>
-              <a:t>1/1/2026</a:t>
+              <a:t>8/6/2026</a:t>
             </a:fld>
             <a:endParaRPr lang="en-US"/>
           </a:p>
@@ -1016,7 +1018,7 @@
               <a:pPr>
                 <a:defRPr/>
               </a:pPr>
-              <a:t>1/1/2026</a:t>
+              <a:t>8/6/2026</a:t>
             </a:fld>
             <a:endParaRPr lang="en-US"/>
           </a:p>
@@ -1218,7 +1220,7 @@
               <a:pPr>
                 <a:defRPr/>
               </a:pPr>
-              <a:t>1/1/2026</a:t>
+              <a:t>8/6/2026</a:t>
             </a:fld>
             <a:endParaRPr lang="en-US"/>
           </a:p>
@@ -1410,7 +1412,7 @@
               <a:pPr>
                 <a:defRPr/>
               </a:pPr>
-              <a:t>1/1/2026</a:t>
+              <a:t>8/6/2026</a:t>
             </a:fld>
             <a:endParaRPr lang="en-US"/>
           </a:p>
@@ -1678,7 +1680,7 @@
               <a:pPr>
                 <a:defRPr/>
               </a:pPr>
-              <a:t>1/1/2026</a:t>
+              <a:t>8/6/2026</a:t>
             </a:fld>
             <a:endParaRPr lang="en-US"/>
           </a:p>
@@ -1988,7 +1990,7 @@
               <a:pPr>
                 <a:defRPr/>
               </a:pPr>
-              <a:t>1/1/2026</a:t>
+              <a:t>8/6/2026</a:t>
             </a:fld>
             <a:endParaRPr lang="en-US"/>
           </a:p>
@@ -2432,7 +2434,7 @@
               <a:pPr>
                 <a:defRPr/>
               </a:pPr>
-              <a:t>1/1/2026</a:t>
+              <a:t>8/6/2026</a:t>
             </a:fld>
             <a:endParaRPr lang="en-US"/>
           </a:p>
@@ -2572,7 +2574,7 @@
               <a:pPr>
                 <a:defRPr/>
               </a:pPr>
-              <a:t>1/1/2026</a:t>
+              <a:t>8/6/2026</a:t>
             </a:fld>
             <a:endParaRPr lang="en-US"/>
           </a:p>
@@ -2689,7 +2691,7 @@
               <a:pPr>
                 <a:defRPr/>
               </a:pPr>
-              <a:t>1/1/2026</a:t>
+              <a:t>8/6/2026</a:t>
             </a:fld>
             <a:endParaRPr lang="en-US"/>
           </a:p>
@@ -2988,7 +2990,7 @@
               <a:pPr>
                 <a:defRPr/>
               </a:pPr>
-              <a:t>1/1/2026</a:t>
+              <a:t>8/6/2026</a:t>
             </a:fld>
             <a:endParaRPr lang="en-US"/>
           </a:p>
@@ -3266,7 +3268,7 @@
               <a:pPr>
                 <a:defRPr/>
               </a:pPr>
-              <a:t>1/1/2026</a:t>
+              <a:t>8/6/2026</a:t>
             </a:fld>
             <a:endParaRPr lang="en-US"/>
           </a:p>
@@ -3514,7 +3516,7 @@
               <a:pPr>
                 <a:defRPr/>
               </a:pPr>
-              <a:t>1/1/2026</a:t>
+              <a:t>8/6/2026</a:t>
             </a:fld>
             <a:endParaRPr lang="en-US"/>
           </a:p>
@@ -6782,7 +6784,6 @@
               <a:rPr lang="en-US" sz="2400" dirty="0" smtClean="0"/>
               <a:t>Prometheus</a:t>
             </a:r>
-            <a:endParaRPr lang="en-US" sz="2400" dirty="0" smtClean="0"/>
           </a:p>
           <a:p>
             <a:pPr marL="571500" indent="-571500">
@@ -8818,15 +8819,7 @@
             </a:r>
             <a:r>
               <a:rPr lang="en-US" dirty="0" smtClean="0"/>
-              <a:t> service discoveries you can </a:t>
-            </a:r>
-            <a:r>
-              <a:rPr lang="en-US" dirty="0" smtClean="0"/>
-              <a:t>use with </a:t>
-            </a:r>
-            <a:r>
-              <a:rPr lang="en-US" dirty="0" smtClean="0"/>
-              <a:t>Prometheus, namely </a:t>
+              <a:t> service discoveries you can use with Prometheus, namely </a:t>
             </a:r>
             <a:r>
               <a:rPr lang="en-US" i="1" dirty="0" smtClean="0"/>
@@ -8838,21 +8831,13 @@
             </a:r>
             <a:r>
               <a:rPr lang="en-US" i="1" dirty="0" smtClean="0"/>
-              <a:t>, service, pod, and ingress</a:t>
-            </a:r>
-            <a:r>
-              <a:rPr lang="en-US" i="1" dirty="0" smtClean="0"/>
-              <a:t>.</a:t>
+              <a:t>, service, pod, and ingress.</a:t>
             </a:r>
           </a:p>
           <a:p>
             <a:r>
               <a:rPr lang="en-US" dirty="0" smtClean="0"/>
-              <a:t>Prometheus </a:t>
-            </a:r>
-            <a:r>
-              <a:rPr lang="en-US" dirty="0" smtClean="0"/>
-              <a:t>uses the </a:t>
+              <a:t>Prometheus uses the </a:t>
             </a:r>
             <a:r>
               <a:rPr lang="en-US" dirty="0" err="1" smtClean="0"/>
@@ -8908,11 +8893,7 @@
           <a:p>
             <a:r>
               <a:rPr lang="en-US" dirty="0" smtClean="0"/>
-              <a:t>Node </a:t>
-            </a:r>
-            <a:r>
-              <a:rPr lang="en-US" dirty="0" smtClean="0"/>
-              <a:t>Service Discovery</a:t>
+              <a:t>Node Service Discovery</a:t>
             </a:r>
             <a:endParaRPr lang="en-US" dirty="0"/>
           </a:p>
@@ -8951,11 +8932,7 @@
             </a:r>
             <a:r>
               <a:rPr lang="en-US" sz="2000" dirty="0" smtClean="0"/>
-              <a:t> cluster</a:t>
-            </a:r>
-            <a:r>
-              <a:rPr lang="en-US" sz="2000" dirty="0" smtClean="0"/>
-              <a:t>, and you will use it to monitor the infrastructure around </a:t>
+              <a:t> cluster, and you will use it to monitor the infrastructure around </a:t>
             </a:r>
             <a:r>
               <a:rPr lang="en-US" sz="2000" dirty="0" err="1" smtClean="0"/>
@@ -8981,19 +8958,7 @@
             </a:r>
             <a:r>
               <a:rPr lang="en-US" sz="2000" dirty="0" smtClean="0"/>
-              <a:t> </a:t>
-            </a:r>
-            <a:r>
-              <a:rPr lang="en-US" sz="2000" dirty="0" smtClean="0"/>
-              <a:t>is the name of the agent that runs on each node, and you should scrape it </a:t>
-            </a:r>
-            <a:r>
-              <a:rPr lang="en-US" sz="2000" dirty="0" smtClean="0"/>
-              <a:t>as part </a:t>
-            </a:r>
-            <a:r>
-              <a:rPr lang="en-US" sz="2000" dirty="0" smtClean="0"/>
-              <a:t>of monitoring the health of the </a:t>
+              <a:t> is the name of the agent that runs on each node, and you should scrape it as part of monitoring the health of the </a:t>
             </a:r>
             <a:r>
               <a:rPr lang="en-US" sz="2000" dirty="0" err="1" smtClean="0"/>
@@ -9120,46 +9085,13 @@
             </a:r>
             <a:r>
               <a:rPr lang="en-US" sz="2200" dirty="0" smtClean="0"/>
-              <a:t>, which provides </a:t>
-            </a:r>
+              <a:t>, which provides DNS services. Its pod has multiple ports, including a port named metrics that serves Prometheus metrics.</a:t>
+            </a:r>
+          </a:p>
+          <a:p>
             <a:r>
               <a:rPr lang="en-US" sz="2200" dirty="0" smtClean="0"/>
-              <a:t>DNS services</a:t>
-            </a:r>
-            <a:r>
-              <a:rPr lang="en-US" sz="2200" dirty="0" smtClean="0"/>
-              <a:t>. Its pod has multiple ports, including a port named metrics that </a:t>
-            </a:r>
-            <a:r>
-              <a:rPr lang="en-US" sz="2200" dirty="0" smtClean="0"/>
-              <a:t>serves Prometheus </a:t>
-            </a:r>
-            <a:r>
-              <a:rPr lang="en-US" sz="2200" dirty="0" smtClean="0"/>
-              <a:t>metrics.</a:t>
-            </a:r>
-            <a:endParaRPr lang="en-US" sz="2200" dirty="0" smtClean="0"/>
-          </a:p>
-          <a:p>
-            <a:r>
-              <a:rPr lang="en-US" sz="2200" dirty="0" smtClean="0"/>
-              <a:t>Discover </a:t>
-            </a:r>
-            <a:r>
-              <a:rPr lang="en-US" sz="2200" dirty="0" smtClean="0"/>
-              <a:t>all pod ports with the name metrics and </a:t>
-            </a:r>
-            <a:r>
-              <a:rPr lang="en-US" sz="2200" dirty="0" smtClean="0"/>
-              <a:t>to use </a:t>
-            </a:r>
-            <a:r>
-              <a:rPr lang="en-US" sz="2200" dirty="0" smtClean="0"/>
-              <a:t>the container name as the job </a:t>
-            </a:r>
-            <a:r>
-              <a:rPr lang="en-US" sz="2200" dirty="0" smtClean="0"/>
-              <a:t>label:</a:t>
+              <a:t>Discover all pod ports with the name metrics and to use the container name as the job label:</a:t>
             </a:r>
             <a:endParaRPr lang="en-US" sz="2200" dirty="0"/>
           </a:p>
@@ -9359,11 +9291,7 @@
             </a:r>
             <a:r>
               <a:rPr lang="en-US" sz="2400" dirty="0" smtClean="0"/>
-              <a:t> service discovery you can have Prometheus scrape your </a:t>
-            </a:r>
-            <a:r>
-              <a:rPr lang="en-US" sz="2400" dirty="0" smtClean="0"/>
-              <a:t>applications and </a:t>
+              <a:t> service discovery you can have Prometheus scrape your applications and </a:t>
             </a:r>
             <a:r>
               <a:rPr lang="en-US" sz="2400" dirty="0" err="1" smtClean="0"/>
@@ -9383,11 +9311,7 @@
             </a:r>
             <a:r>
               <a:rPr lang="en-US" sz="2400" dirty="0" smtClean="0"/>
-              <a:t> include metrics about </a:t>
-            </a:r>
-            <a:r>
-              <a:rPr lang="en-US" sz="2400" dirty="0" smtClean="0"/>
-              <a:t>what </a:t>
+              <a:t> include metrics about what </a:t>
             </a:r>
             <a:r>
               <a:rPr lang="en-US" sz="2400" dirty="0" err="1" smtClean="0"/>
@@ -9395,11 +9319,7 @@
             </a:r>
             <a:r>
               <a:rPr lang="en-US" sz="2400" dirty="0" smtClean="0"/>
-              <a:t> </a:t>
-            </a:r>
-            <a:r>
-              <a:rPr lang="en-US" sz="2400" dirty="0" smtClean="0"/>
-              <a:t>knows about your </a:t>
+              <a:t> knows about your </a:t>
             </a:r>
             <a:r>
               <a:rPr lang="en-US" sz="2400" u="sng" dirty="0" smtClean="0"/>
@@ -9423,21 +9343,13 @@
             </a:r>
             <a:r>
               <a:rPr lang="en-US" sz="2400" dirty="0" smtClean="0"/>
-              <a:t>, and other resources</a:t>
-            </a:r>
-            <a:r>
-              <a:rPr lang="en-US" sz="2400" dirty="0" smtClean="0"/>
-              <a:t>.</a:t>
-            </a:r>
-          </a:p>
-          <a:p>
-            <a:r>
-              <a:rPr lang="en-US" sz="2400" dirty="0" smtClean="0"/>
-              <a:t>This is </a:t>
-            </a:r>
-            <a:r>
-              <a:rPr lang="en-US" sz="2400" dirty="0" smtClean="0"/>
-              <a:t>because applications such as the </a:t>
+              <a:t>, and other resources.</a:t>
+            </a:r>
+          </a:p>
+          <a:p>
+            <a:r>
+              <a:rPr lang="en-US" sz="2400" dirty="0" smtClean="0"/>
+              <a:t>This is because applications such as the </a:t>
             </a:r>
             <a:r>
               <a:rPr lang="en-US" sz="2400" dirty="0" err="1" smtClean="0"/>
@@ -9453,11 +9365,7 @@
             </a:r>
             <a:r>
               <a:rPr lang="en-US" sz="2400" dirty="0" smtClean="0"/>
-              <a:t> API servers should </a:t>
-            </a:r>
-            <a:r>
-              <a:rPr lang="en-US" sz="2400" dirty="0" smtClean="0"/>
-              <a:t>expose </a:t>
+              <a:t> API servers should expose </a:t>
             </a:r>
             <a:r>
               <a:rPr lang="en-US" sz="2400" i="1" dirty="0" smtClean="0">
@@ -9465,15 +9373,7 @@
                   <a:srgbClr val="C00000"/>
                 </a:solidFill>
               </a:rPr>
-              <a:t>information </a:t>
-            </a:r>
-            <a:r>
-              <a:rPr lang="en-US" sz="2400" i="1" dirty="0" smtClean="0">
-                <a:solidFill>
-                  <a:srgbClr val="C00000"/>
-                </a:solidFill>
-              </a:rPr>
-              <a:t>about their own performance</a:t>
+              <a:t>information about their own performance</a:t>
             </a:r>
             <a:r>
               <a:rPr lang="en-US" sz="2400" dirty="0" smtClean="0"/>
@@ -9481,11 +9381,7 @@
             </a:r>
             <a:r>
               <a:rPr lang="en-US" sz="2400" u="sng" dirty="0" smtClean="0"/>
-              <a:t>not dump their internal data </a:t>
-            </a:r>
-            <a:r>
-              <a:rPr lang="en-US" sz="2400" u="sng" dirty="0" smtClean="0"/>
-              <a:t>structures</a:t>
+              <a:t>not dump their internal data structures</a:t>
             </a:r>
             <a:r>
               <a:rPr lang="en-US" sz="2400" dirty="0" smtClean="0"/>
@@ -9495,27 +9391,7 @@
           <a:p>
             <a:r>
               <a:rPr lang="en-US" sz="2400" dirty="0" smtClean="0"/>
-              <a:t>Instead, you would obtain such metrics from another endpoint</a:t>
-            </a:r>
-            <a:r>
-              <a:rPr lang="en-US" sz="2400" dirty="0" smtClean="0"/>
-              <a:t>, </a:t>
-            </a:r>
-            <a:r>
-              <a:rPr lang="en-US" sz="2400" dirty="0" smtClean="0"/>
-              <a:t>or if that </a:t>
-            </a:r>
-            <a:r>
-              <a:rPr lang="en-US" sz="2400" dirty="0" smtClean="0"/>
-              <a:t>doesn’t exist</a:t>
-            </a:r>
-            <a:r>
-              <a:rPr lang="en-US" sz="2400" dirty="0" smtClean="0"/>
-              <a:t>, have an exporter that extracts the relevant </a:t>
-            </a:r>
-            <a:r>
-              <a:rPr lang="en-US" sz="2400" dirty="0" smtClean="0"/>
-              <a:t>information.</a:t>
+              <a:t>Instead, you would obtain such metrics from another endpoint, or if that doesn’t exist, have an exporter that extracts the relevant information.</a:t>
             </a:r>
           </a:p>
           <a:p>
@@ -9549,11 +9425,7 @@
             </a:r>
             <a:r>
               <a:rPr lang="en-US" sz="2400" dirty="0" smtClean="0"/>
-              <a:t> </a:t>
-            </a:r>
-            <a:r>
-              <a:rPr lang="en-US" sz="2400" dirty="0" smtClean="0"/>
-              <a:t>is that </a:t>
+              <a:t> is that </a:t>
             </a:r>
             <a:r>
               <a:rPr lang="en-US" sz="2400" u="sng" dirty="0" smtClean="0"/>
@@ -9771,19 +9643,7 @@
             <a:pPr algn="l"/>
             <a:r>
               <a:rPr lang="en-US" dirty="0" smtClean="0"/>
-              <a:t>4. </a:t>
-            </a:r>
-            <a:r>
-              <a:rPr lang="en-US" dirty="0" smtClean="0"/>
-              <a:t>Prepare </a:t>
-            </a:r>
-            <a:r>
-              <a:rPr lang="en-US" dirty="0" smtClean="0"/>
-              <a:t>KSM </a:t>
-            </a:r>
-            <a:r>
-              <a:rPr lang="en-US" dirty="0" smtClean="0"/>
-              <a:t>Deployment</a:t>
+              <a:t>4. Prepare KSM Deployment</a:t>
             </a:r>
             <a:endParaRPr lang="en-US" dirty="0"/>
           </a:p>
@@ -9810,11 +9670,7 @@
             </a:r>
             <a:r>
               <a:rPr lang="en-US" sz="2400" b="1" dirty="0" smtClean="0"/>
-              <a:t> </a:t>
-            </a:r>
-            <a:r>
-              <a:rPr lang="en-US" sz="2400" b="1" dirty="0" smtClean="0"/>
-              <a:t>kube-state-metrics.yml</a:t>
+              <a:t> kube-state-metrics.yml</a:t>
             </a:r>
           </a:p>
           <a:p>
@@ -9897,19 +9753,7 @@
             <a:pPr algn="l"/>
             <a:r>
               <a:rPr lang="en-US" dirty="0" smtClean="0"/>
-              <a:t>5</a:t>
-            </a:r>
-            <a:r>
-              <a:rPr lang="en-US" dirty="0" smtClean="0"/>
-              <a:t>. </a:t>
-            </a:r>
-            <a:r>
-              <a:rPr lang="en-US" dirty="0" smtClean="0"/>
-              <a:t>Deploy </a:t>
-            </a:r>
-            <a:r>
-              <a:rPr lang="en-US" dirty="0" smtClean="0"/>
-              <a:t>KSM</a:t>
+              <a:t>5. Deploy KSM</a:t>
             </a:r>
             <a:endParaRPr lang="en-US" dirty="0"/>
           </a:p>
@@ -9936,13 +9780,8 @@
             </a:r>
             <a:r>
               <a:rPr lang="en-US" sz="2400" b="1" dirty="0" smtClean="0"/>
-              <a:t> apply -f </a:t>
-            </a:r>
-            <a:r>
-              <a:rPr lang="en-US" sz="2400" b="1" dirty="0" smtClean="0"/>
-              <a:t>kube-state-metrics.yml</a:t>
-            </a:r>
-            <a:endParaRPr lang="en-US" sz="2400" b="1" dirty="0" smtClean="0"/>
+              <a:t> apply -f kube-state-metrics.yml</a:t>
+            </a:r>
           </a:p>
           <a:p>
             <a:r>
@@ -9951,11 +9790,7 @@
             </a:r>
             <a:r>
               <a:rPr lang="en-US" sz="2400" dirty="0" smtClean="0"/>
-              <a:t> port-forward </a:t>
-            </a:r>
-            <a:r>
-              <a:rPr lang="en-US" sz="2400" dirty="0" smtClean="0"/>
-              <a:t>svc/</a:t>
+              <a:t> port-forward svc/</a:t>
             </a:r>
             <a:r>
               <a:rPr lang="en-US" sz="2400" b="1" dirty="0" err="1" smtClean="0"/>
@@ -9967,11 +9802,7 @@
             </a:r>
             <a:r>
               <a:rPr lang="en-US" sz="2400" dirty="0" smtClean="0"/>
-              <a:t> </a:t>
-            </a:r>
-            <a:r>
-              <a:rPr lang="en-US" sz="2400" dirty="0" smtClean="0"/>
-              <a:t>9090:9090 --address=0.0.0.0</a:t>
+              <a:t> 9090:9090 --address=0.0.0.0</a:t>
             </a:r>
           </a:p>
           <a:p>
@@ -10022,15 +9853,7 @@
             <a:pPr algn="l"/>
             <a:r>
               <a:rPr lang="en-US" dirty="0" smtClean="0"/>
-              <a:t>6</a:t>
-            </a:r>
-            <a:r>
-              <a:rPr lang="en-US" dirty="0" smtClean="0"/>
-              <a:t>. </a:t>
-            </a:r>
-            <a:r>
-              <a:rPr lang="en-US" dirty="0" smtClean="0"/>
-              <a:t>Open Prometheus</a:t>
+              <a:t>6. Open Prometheus</a:t>
             </a:r>
             <a:endParaRPr lang="en-US" dirty="0"/>
           </a:p>
@@ -10190,11 +10013,7 @@
             <a:pPr algn="l"/>
             <a:r>
               <a:rPr lang="en-US" dirty="0" smtClean="0"/>
-              <a:t>1. Deploy </a:t>
-            </a:r>
-            <a:r>
-              <a:rPr lang="en-US" dirty="0" smtClean="0"/>
-              <a:t>Prometheus using Helm</a:t>
+              <a:t>1. Deploy Prometheus using Helm</a:t>
             </a:r>
             <a:endParaRPr lang="en-US" dirty="0"/>
           </a:p>
@@ -11053,6 +10872,30 @@
             <a:endParaRPr lang="en-US" sz="2400" dirty="0" smtClean="0"/>
           </a:p>
           <a:p>
+            <a:r>
+              <a:rPr lang="en-US" sz="2400" dirty="0" err="1" smtClean="0"/>
+              <a:t>Chronosphere</a:t>
+            </a:r>
+            <a:r>
+              <a:rPr lang="en-US" sz="2400" dirty="0" smtClean="0"/>
+              <a:t> is the world’s most reliable </a:t>
+            </a:r>
+            <a:r>
+              <a:rPr lang="en-US" sz="2400" dirty="0" err="1" smtClean="0"/>
+              <a:t>observability</a:t>
+            </a:r>
+            <a:r>
+              <a:rPr lang="en-US" sz="2400" dirty="0" smtClean="0"/>
+              <a:t> platform for </a:t>
+            </a:r>
+            <a:r>
+              <a:rPr lang="en-US" sz="2400" dirty="0" err="1" smtClean="0"/>
+              <a:t>microservices</a:t>
+            </a:r>
+            <a:r>
+              <a:rPr lang="en-US" sz="2400" dirty="0" smtClean="0"/>
+              <a:t> and containers.</a:t>
+            </a:r>
             <a:endParaRPr lang="en-US" sz="2400" dirty="0"/>
           </a:p>
         </p:txBody>
@@ -11066,6 +10909,244 @@
 </file>
 
 <file path=ppt/slides/slide63.xml><?xml version="1.0" encoding="utf-8"?>
+<p:sld xmlns:a="http://schemas.openxmlformats.org/drawingml/2006/main" xmlns:r="http://schemas.openxmlformats.org/officeDocument/2006/relationships" xmlns:p="http://schemas.openxmlformats.org/presentationml/2006/main">
+  <p:cSld>
+    <p:spTree>
+      <p:nvGrpSpPr>
+        <p:cNvPr id="1" name=""/>
+        <p:cNvGrpSpPr/>
+        <p:nvPr/>
+      </p:nvGrpSpPr>
+      <p:grpSpPr>
+        <a:xfrm>
+          <a:off x="0" y="0"/>
+          <a:ext cx="0" cy="0"/>
+          <a:chOff x="0" y="0"/>
+          <a:chExt cx="0" cy="0"/>
+        </a:xfrm>
+      </p:grpSpPr>
+      <p:sp>
+        <p:nvSpPr>
+          <p:cNvPr id="2" name="Title 1"/>
+          <p:cNvSpPr>
+            <a:spLocks noGrp="1"/>
+          </p:cNvSpPr>
+          <p:nvPr>
+            <p:ph type="title"/>
+          </p:nvPr>
+        </p:nvSpPr>
+        <p:spPr/>
+        <p:txBody>
+          <a:bodyPr/>
+          <a:lstStyle/>
+          <a:p>
+            <a:r>
+              <a:rPr lang="en-US" dirty="0" smtClean="0"/>
+              <a:t>Loki</a:t>
+            </a:r>
+            <a:endParaRPr lang="en-US" dirty="0"/>
+          </a:p>
+        </p:txBody>
+      </p:sp>
+      <p:sp>
+        <p:nvSpPr>
+          <p:cNvPr id="3" name="Content Placeholder 2"/>
+          <p:cNvSpPr>
+            <a:spLocks noGrp="1"/>
+          </p:cNvSpPr>
+          <p:nvPr>
+            <p:ph idx="1"/>
+          </p:nvPr>
+        </p:nvSpPr>
+        <p:spPr/>
+        <p:txBody>
+          <a:bodyPr/>
+          <a:lstStyle/>
+          <a:p>
+            <a:r>
+              <a:rPr lang="en-US" sz="2400" dirty="0" smtClean="0">
+                <a:hlinkClick r:id="rId2"/>
+              </a:rPr>
+              <a:t>https://grafana.com/docs/loki/latest/get-started/overview</a:t>
+            </a:r>
+            <a:r>
+              <a:rPr lang="en-US" sz="2400" dirty="0" smtClean="0">
+                <a:hlinkClick r:id="rId2"/>
+              </a:rPr>
+              <a:t>/</a:t>
+            </a:r>
+            <a:endParaRPr lang="en-US" sz="2400" dirty="0" smtClean="0"/>
+          </a:p>
+          <a:p>
+            <a:r>
+              <a:rPr lang="en-US" sz="2400" dirty="0" smtClean="0"/>
+              <a:t>Loki is a horizontally-scalable, highly-available, multi-tenant log aggregation system inspired by </a:t>
+            </a:r>
+            <a:r>
+              <a:rPr lang="en-US" sz="2400" dirty="0" smtClean="0"/>
+              <a:t>Prometheus.</a:t>
+            </a:r>
+          </a:p>
+          <a:p>
+            <a:r>
+              <a:rPr lang="en-US" sz="2400" dirty="0" smtClean="0"/>
+              <a:t>Loki </a:t>
+            </a:r>
+            <a:r>
+              <a:rPr lang="en-US" sz="2400" dirty="0" smtClean="0"/>
+              <a:t>differs from Prometheus by focusing on logs instead of metrics, and collecting logs via push, instead of pull.</a:t>
+            </a:r>
+            <a:endParaRPr lang="en-US" sz="2400" dirty="0"/>
+          </a:p>
+        </p:txBody>
+      </p:sp>
+      <p:pic>
+        <p:nvPicPr>
+          <p:cNvPr id="1026" name="Picture 2" descr="https://grafana.com/docs/loki/latest/get-started/loki-overview-2.png"/>
+          <p:cNvPicPr>
+            <a:picLocks noChangeAspect="1" noChangeArrowheads="1"/>
+          </p:cNvPicPr>
+          <p:nvPr/>
+        </p:nvPicPr>
+        <p:blipFill>
+          <a:blip r:embed="rId3" cstate="print"/>
+          <a:srcRect/>
+          <a:stretch>
+            <a:fillRect/>
+          </a:stretch>
+        </p:blipFill>
+        <p:spPr bwMode="auto">
+          <a:xfrm>
+            <a:off x="1905000" y="4267200"/>
+            <a:ext cx="5334000" cy="1653540"/>
+          </a:xfrm>
+          <a:prstGeom prst="rect">
+            <a:avLst/>
+          </a:prstGeom>
+          <a:noFill/>
+        </p:spPr>
+      </p:pic>
+    </p:spTree>
+  </p:cSld>
+  <p:clrMapOvr>
+    <a:masterClrMapping/>
+  </p:clrMapOvr>
+</p:sld>
+</file>
+
+<file path=ppt/slides/slide64.xml><?xml version="1.0" encoding="utf-8"?>
+<p:sld xmlns:a="http://schemas.openxmlformats.org/drawingml/2006/main" xmlns:r="http://schemas.openxmlformats.org/officeDocument/2006/relationships" xmlns:p="http://schemas.openxmlformats.org/presentationml/2006/main">
+  <p:cSld>
+    <p:spTree>
+      <p:nvGrpSpPr>
+        <p:cNvPr id="1" name=""/>
+        <p:cNvGrpSpPr/>
+        <p:nvPr/>
+      </p:nvGrpSpPr>
+      <p:grpSpPr>
+        <a:xfrm>
+          <a:off x="0" y="0"/>
+          <a:ext cx="0" cy="0"/>
+          <a:chOff x="0" y="0"/>
+          <a:chExt cx="0" cy="0"/>
+        </a:xfrm>
+      </p:grpSpPr>
+      <p:sp>
+        <p:nvSpPr>
+          <p:cNvPr id="2" name="Title 1"/>
+          <p:cNvSpPr>
+            <a:spLocks noGrp="1"/>
+          </p:cNvSpPr>
+          <p:nvPr>
+            <p:ph type="title"/>
+          </p:nvPr>
+        </p:nvSpPr>
+        <p:spPr/>
+        <p:txBody>
+          <a:bodyPr/>
+          <a:lstStyle/>
+          <a:p>
+            <a:r>
+              <a:rPr lang="en-US" dirty="0" err="1" smtClean="0"/>
+              <a:t>InfluxDB</a:t>
+            </a:r>
+            <a:endParaRPr lang="en-US" dirty="0"/>
+          </a:p>
+        </p:txBody>
+      </p:sp>
+      <p:sp>
+        <p:nvSpPr>
+          <p:cNvPr id="3" name="Content Placeholder 2"/>
+          <p:cNvSpPr>
+            <a:spLocks noGrp="1"/>
+          </p:cNvSpPr>
+          <p:nvPr>
+            <p:ph idx="1"/>
+          </p:nvPr>
+        </p:nvSpPr>
+        <p:spPr/>
+        <p:txBody>
+          <a:bodyPr/>
+          <a:lstStyle/>
+          <a:p>
+            <a:r>
+              <a:rPr lang="en-US" sz="2400" dirty="0" smtClean="0">
+                <a:hlinkClick r:id="rId2"/>
+              </a:rPr>
+              <a:t>https://www.influxdata.com/products/influxdb</a:t>
+            </a:r>
+            <a:r>
+              <a:rPr lang="en-US" sz="2400" dirty="0" smtClean="0">
+                <a:hlinkClick r:id="rId2"/>
+              </a:rPr>
+              <a:t>/</a:t>
+            </a:r>
+            <a:endParaRPr lang="en-US" sz="2400" dirty="0" smtClean="0"/>
+          </a:p>
+          <a:p>
+            <a:r>
+              <a:rPr lang="en-US" sz="2400" dirty="0" smtClean="0"/>
+              <a:t>Most databases </a:t>
+            </a:r>
+            <a:r>
+              <a:rPr lang="en-US" sz="2400" dirty="0" smtClean="0"/>
+              <a:t>weren't </a:t>
+            </a:r>
+            <a:r>
+              <a:rPr lang="en-US" sz="2400" dirty="0" smtClean="0"/>
+              <a:t>built for time series</a:t>
+            </a:r>
+            <a:r>
+              <a:rPr lang="en-US" sz="2400" dirty="0" smtClean="0"/>
+              <a:t>.</a:t>
+            </a:r>
+          </a:p>
+          <a:p>
+            <a:r>
+              <a:rPr lang="en-US" sz="2400" dirty="0" err="1" smtClean="0"/>
+              <a:t>InfluxDB</a:t>
+            </a:r>
+            <a:r>
+              <a:rPr lang="en-US" sz="2400" dirty="0" smtClean="0"/>
+              <a:t> 3 Core is built to handle continuous, high-resolution data with precision and </a:t>
+            </a:r>
+            <a:r>
+              <a:rPr lang="en-US" sz="2400" dirty="0" smtClean="0"/>
+              <a:t>speed.</a:t>
+            </a:r>
+            <a:endParaRPr lang="en-US" sz="2400" dirty="0"/>
+          </a:p>
+        </p:txBody>
+      </p:sp>
+    </p:spTree>
+  </p:cSld>
+  <p:clrMapOvr>
+    <a:masterClrMapping/>
+  </p:clrMapOvr>
+</p:sld>
+</file>
+
+<file path=ppt/slides/slide65.xml><?xml version="1.0" encoding="utf-8"?>
 <p:sld xmlns:a="http://schemas.openxmlformats.org/drawingml/2006/main" xmlns:r="http://schemas.openxmlformats.org/officeDocument/2006/relationships" xmlns:p="http://schemas.openxmlformats.org/presentationml/2006/main">
   <p:cSld>
     <p:spTree>

--- a/Microservices/05.10. Prometheus.pptx
+++ b/Microservices/05.10. Prometheus.pptx
@@ -5,7 +5,7 @@
     <p:sldMasterId id="2147483708" r:id="rId1"/>
   </p:sldMasterIdLst>
   <p:notesMasterIdLst>
-    <p:notesMasterId r:id="rId67"/>
+    <p:notesMasterId r:id="rId68"/>
   </p:notesMasterIdLst>
   <p:sldIdLst>
     <p:sldId id="670" r:id="rId2"/>
@@ -68,11 +68,12 @@
     <p:sldId id="705" r:id="rId59"/>
     <p:sldId id="706" r:id="rId60"/>
     <p:sldId id="709" r:id="rId61"/>
-    <p:sldId id="691" r:id="rId62"/>
-    <p:sldId id="690" r:id="rId63"/>
-    <p:sldId id="745" r:id="rId64"/>
-    <p:sldId id="746" r:id="rId65"/>
-    <p:sldId id="516" r:id="rId66"/>
+    <p:sldId id="747" r:id="rId62"/>
+    <p:sldId id="691" r:id="rId63"/>
+    <p:sldId id="690" r:id="rId64"/>
+    <p:sldId id="745" r:id="rId65"/>
+    <p:sldId id="746" r:id="rId66"/>
+    <p:sldId id="516" r:id="rId67"/>
   </p:sldIdLst>
   <p:sldSz cx="9144000" cy="6858000" type="screen4x3"/>
   <p:notesSz cx="6858000" cy="9144000"/>
@@ -10774,6 +10775,126 @@
           <a:chExt cx="0" cy="0"/>
         </a:xfrm>
       </p:grpSpPr>
+      <p:sp>
+        <p:nvSpPr>
+          <p:cNvPr id="2" name="Title 1"/>
+          <p:cNvSpPr>
+            <a:spLocks noGrp="1"/>
+          </p:cNvSpPr>
+          <p:nvPr>
+            <p:ph type="title"/>
+          </p:nvPr>
+        </p:nvSpPr>
+        <p:spPr/>
+        <p:txBody>
+          <a:bodyPr/>
+          <a:lstStyle/>
+          <a:p>
+            <a:r>
+              <a:rPr lang="en-US" dirty="0" smtClean="0"/>
+              <a:t>Elastic </a:t>
+            </a:r>
+            <a:r>
+              <a:rPr lang="en-US" dirty="0" err="1" smtClean="0"/>
+              <a:t>Observability</a:t>
+            </a:r>
+            <a:endParaRPr lang="en-US" dirty="0"/>
+          </a:p>
+        </p:txBody>
+      </p:sp>
+      <p:sp>
+        <p:nvSpPr>
+          <p:cNvPr id="3" name="Content Placeholder 2"/>
+          <p:cNvSpPr>
+            <a:spLocks noGrp="1"/>
+          </p:cNvSpPr>
+          <p:nvPr>
+            <p:ph idx="1"/>
+          </p:nvPr>
+        </p:nvSpPr>
+        <p:spPr/>
+        <p:txBody>
+          <a:bodyPr/>
+          <a:lstStyle/>
+          <a:p>
+            <a:r>
+              <a:rPr lang="en-US" sz="2400" dirty="0" smtClean="0">
+                <a:hlinkClick r:id="rId2"/>
+              </a:rPr>
+              <a:t>https://</a:t>
+            </a:r>
+            <a:r>
+              <a:rPr lang="en-US" sz="2400" dirty="0" smtClean="0">
+                <a:hlinkClick r:id="rId2"/>
+              </a:rPr>
+              <a:t>www.elastic.co/docs/reference/apm/agents/dotnet/setup-asp-dot-net</a:t>
+            </a:r>
+            <a:endParaRPr lang="en-US" sz="2400" dirty="0" smtClean="0"/>
+          </a:p>
+          <a:p>
+            <a:r>
+              <a:rPr lang="en-US" sz="2400" dirty="0" smtClean="0">
+                <a:hlinkClick r:id="rId3"/>
+              </a:rPr>
+              <a:t>https://</a:t>
+            </a:r>
+            <a:r>
+              <a:rPr lang="en-US" sz="2400" dirty="0" smtClean="0">
+                <a:hlinkClick r:id="rId3"/>
+              </a:rPr>
+              <a:t>www.elastic.co/docs/reference/apm/agents/dotnet/configuration-on-asp-net</a:t>
+            </a:r>
+            <a:endParaRPr lang="en-US" sz="2400" dirty="0" smtClean="0"/>
+          </a:p>
+          <a:p>
+            <a:r>
+              <a:rPr lang="en-US" sz="2400" dirty="0" smtClean="0"/>
+              <a:t>Application Performance Monitoring (APM) collects in-depth performance metrics and errors from inside your application</a:t>
+            </a:r>
+            <a:r>
+              <a:rPr lang="en-US" sz="2400" dirty="0" smtClean="0"/>
+              <a:t>.</a:t>
+            </a:r>
+            <a:endParaRPr lang="en-US" sz="2400" smtClean="0"/>
+          </a:p>
+          <a:p>
+            <a:r>
+              <a:rPr lang="en-US" sz="2400" smtClean="0"/>
+              <a:t>It </a:t>
+            </a:r>
+            <a:r>
+              <a:rPr lang="en-US" sz="2400" dirty="0" smtClean="0"/>
+              <a:t>allows you to monitor the performance of thousands of applications in real time.</a:t>
+            </a:r>
+            <a:endParaRPr lang="en-US" sz="2400" dirty="0"/>
+          </a:p>
+        </p:txBody>
+      </p:sp>
+    </p:spTree>
+  </p:cSld>
+  <p:clrMapOvr>
+    <a:masterClrMapping/>
+  </p:clrMapOvr>
+</p:sld>
+</file>
+
+<file path=ppt/slides/slide62.xml><?xml version="1.0" encoding="utf-8"?>
+<p:sld xmlns:a="http://schemas.openxmlformats.org/drawingml/2006/main" xmlns:r="http://schemas.openxmlformats.org/officeDocument/2006/relationships" xmlns:p="http://schemas.openxmlformats.org/presentationml/2006/main">
+  <p:cSld>
+    <p:spTree>
+      <p:nvGrpSpPr>
+        <p:cNvPr id="1" name=""/>
+        <p:cNvGrpSpPr/>
+        <p:nvPr/>
+      </p:nvGrpSpPr>
+      <p:grpSpPr>
+        <a:xfrm>
+          <a:off x="0" y="0"/>
+          <a:ext cx="0" cy="0"/>
+          <a:chOff x="0" y="0"/>
+          <a:chExt cx="0" cy="0"/>
+        </a:xfrm>
+      </p:grpSpPr>
       <p:pic>
         <p:nvPicPr>
           <p:cNvPr id="4" name="Picture 2" descr="https://lh3.ggpht.com/1IfZLL2QDSjZ0wS7sUhaMlsAOS8BBzdR3wZ1WawgRn7KZAM8nEVZYMOUM-lqQb0ikIzp=w300"/>
@@ -10808,7 +10929,7 @@
 </p:sld>
 </file>
 
-<file path=ppt/slides/slide62.xml><?xml version="1.0" encoding="utf-8"?>
+<file path=ppt/slides/slide63.xml><?xml version="1.0" encoding="utf-8"?>
 <p:sld xmlns:a="http://schemas.openxmlformats.org/drawingml/2006/main" xmlns:r="http://schemas.openxmlformats.org/officeDocument/2006/relationships" xmlns:p="http://schemas.openxmlformats.org/presentationml/2006/main">
   <p:cSld>
     <p:spTree>
@@ -10908,7 +11029,7 @@
 </p:sld>
 </file>
 
-<file path=ppt/slides/slide63.xml><?xml version="1.0" encoding="utf-8"?>
+<file path=ppt/slides/slide64.xml><?xml version="1.0" encoding="utf-8"?>
 <p:sld xmlns:a="http://schemas.openxmlformats.org/drawingml/2006/main" xmlns:r="http://schemas.openxmlformats.org/officeDocument/2006/relationships" xmlns:p="http://schemas.openxmlformats.org/presentationml/2006/main">
   <p:cSld>
     <p:spTree>
@@ -11034,7 +11155,7 @@
 </p:sld>
 </file>
 
-<file path=ppt/slides/slide64.xml><?xml version="1.0" encoding="utf-8"?>
+<file path=ppt/slides/slide65.xml><?xml version="1.0" encoding="utf-8"?>
 <p:sld xmlns:a="http://schemas.openxmlformats.org/drawingml/2006/main" xmlns:r="http://schemas.openxmlformats.org/officeDocument/2006/relationships" xmlns:p="http://schemas.openxmlformats.org/presentationml/2006/main">
   <p:cSld>
     <p:spTree>
@@ -11146,7 +11267,7 @@
 </p:sld>
 </file>
 
-<file path=ppt/slides/slide65.xml><?xml version="1.0" encoding="utf-8"?>
+<file path=ppt/slides/slide66.xml><?xml version="1.0" encoding="utf-8"?>
 <p:sld xmlns:a="http://schemas.openxmlformats.org/drawingml/2006/main" xmlns:r="http://schemas.openxmlformats.org/officeDocument/2006/relationships" xmlns:p="http://schemas.openxmlformats.org/presentationml/2006/main">
   <p:cSld>
     <p:spTree>

--- a/Microservices/05.10. Prometheus.pptx
+++ b/Microservices/05.10. Prometheus.pptx
@@ -10855,16 +10855,49 @@
               <a:rPr lang="en-US" sz="2400" dirty="0" smtClean="0"/>
               <a:t>.</a:t>
             </a:r>
-            <a:endParaRPr lang="en-US" sz="2400" smtClean="0"/>
-          </a:p>
-          <a:p>
+          </a:p>
+          <a:p>
+            <a:r>
+              <a:rPr lang="en-US" sz="2400" dirty="0" smtClean="0"/>
+              <a:t>It </a:t>
+            </a:r>
+            <a:r>
+              <a:rPr lang="en-US" sz="2400" dirty="0" smtClean="0"/>
+              <a:t>allows you to monitor the performance of thousands of applications in real time</a:t>
+            </a:r>
+            <a:r>
+              <a:rPr lang="en-US" sz="2400" dirty="0" smtClean="0"/>
+              <a:t>.</a:t>
+            </a:r>
+          </a:p>
+          <a:p>
+            <a:r>
+              <a:rPr lang="en-US" sz="2400" dirty="0" smtClean="0"/>
+              <a:t>curl.exe -</a:t>
+            </a:r>
+            <a:r>
+              <a:rPr lang="en-US" sz="2400" dirty="0" err="1" smtClean="0"/>
+              <a:t>i</a:t>
+            </a:r>
+            <a:r>
+              <a:rPr lang="en-US" sz="2400" dirty="0" smtClean="0"/>
+              <a:t> -H "Authorization: </a:t>
+            </a:r>
+            <a:r>
+              <a:rPr lang="en-US" sz="2400" dirty="0" err="1" smtClean="0"/>
+              <a:t>ApiKey</a:t>
+            </a:r>
             <a:r>
               <a:rPr lang="en-US" sz="2400" smtClean="0"/>
-              <a:t>It </a:t>
-            </a:r>
-            <a:r>
-              <a:rPr lang="en-US" sz="2400" dirty="0" smtClean="0"/>
-              <a:t>allows you to monitor the performance of thousands of applications in real time.</a:t>
+              <a:t> </a:t>
+            </a:r>
+            <a:r>
+              <a:rPr lang="en-US" sz="2400" smtClean="0"/>
+              <a:t>RW…w</a:t>
+            </a:r>
+            <a:r>
+              <a:rPr lang="en-US" sz="2400" dirty="0" smtClean="0"/>
+              <a:t>" "https://my-observability-project-cfb03b.apm.us-west1.gcp.elastic.cloud/"</a:t>
             </a:r>
             <a:endParaRPr lang="en-US" sz="2400" dirty="0"/>
           </a:p>

--- a/Microservices/05.10. Prometheus.pptx
+++ b/Microservices/05.10. Prometheus.pptx
@@ -5,7 +5,7 @@
     <p:sldMasterId id="2147483708" r:id="rId1"/>
   </p:sldMasterIdLst>
   <p:notesMasterIdLst>
-    <p:notesMasterId r:id="rId68"/>
+    <p:notesMasterId r:id="rId69"/>
   </p:notesMasterIdLst>
   <p:sldIdLst>
     <p:sldId id="670" r:id="rId2"/>
@@ -69,11 +69,12 @@
     <p:sldId id="706" r:id="rId60"/>
     <p:sldId id="709" r:id="rId61"/>
     <p:sldId id="747" r:id="rId62"/>
-    <p:sldId id="691" r:id="rId63"/>
-    <p:sldId id="690" r:id="rId64"/>
-    <p:sldId id="745" r:id="rId65"/>
-    <p:sldId id="746" r:id="rId66"/>
-    <p:sldId id="516" r:id="rId67"/>
+    <p:sldId id="748" r:id="rId63"/>
+    <p:sldId id="691" r:id="rId64"/>
+    <p:sldId id="690" r:id="rId65"/>
+    <p:sldId id="745" r:id="rId66"/>
+    <p:sldId id="746" r:id="rId67"/>
+    <p:sldId id="516" r:id="rId68"/>
   </p:sldIdLst>
   <p:sldSz cx="9144000" cy="6858000" type="screen4x3"/>
   <p:notesSz cx="6858000" cy="9144000"/>
@@ -10888,11 +10889,11 @@
               <a:t>ApiKey</a:t>
             </a:r>
             <a:r>
-              <a:rPr lang="en-US" sz="2400" smtClean="0"/>
+              <a:rPr lang="en-US" sz="2400" dirty="0" smtClean="0"/>
               <a:t> </a:t>
             </a:r>
             <a:r>
-              <a:rPr lang="en-US" sz="2400" smtClean="0"/>
+              <a:rPr lang="en-US" sz="2400" dirty="0" smtClean="0"/>
               <a:t>RW…w</a:t>
             </a:r>
             <a:r>
@@ -10912,6 +10913,98 @@
 </file>
 
 <file path=ppt/slides/slide62.xml><?xml version="1.0" encoding="utf-8"?>
+<p:sld xmlns:a="http://schemas.openxmlformats.org/drawingml/2006/main" xmlns:r="http://schemas.openxmlformats.org/officeDocument/2006/relationships" xmlns:p="http://schemas.openxmlformats.org/presentationml/2006/main">
+  <p:cSld>
+    <p:spTree>
+      <p:nvGrpSpPr>
+        <p:cNvPr id="1" name=""/>
+        <p:cNvGrpSpPr/>
+        <p:nvPr/>
+      </p:nvGrpSpPr>
+      <p:grpSpPr>
+        <a:xfrm>
+          <a:off x="0" y="0"/>
+          <a:ext cx="0" cy="0"/>
+          <a:chOff x="0" y="0"/>
+          <a:chExt cx="0" cy="0"/>
+        </a:xfrm>
+      </p:grpSpPr>
+      <p:sp>
+        <p:nvSpPr>
+          <p:cNvPr id="2" name="Title 1"/>
+          <p:cNvSpPr>
+            <a:spLocks noGrp="1"/>
+          </p:cNvSpPr>
+          <p:nvPr>
+            <p:ph type="title"/>
+          </p:nvPr>
+        </p:nvSpPr>
+        <p:spPr/>
+        <p:txBody>
+          <a:bodyPr/>
+          <a:lstStyle/>
+          <a:p>
+            <a:r>
+              <a:rPr lang="en-US" dirty="0" smtClean="0"/>
+              <a:t>View </a:t>
+            </a:r>
+            <a:r>
+              <a:rPr lang="en-US" dirty="0" smtClean="0"/>
+              <a:t>Telemetry on </a:t>
+            </a:r>
+            <a:r>
+              <a:rPr lang="en-US" smtClean="0"/>
+              <a:t>Elastic </a:t>
+            </a:r>
+            <a:r>
+              <a:rPr lang="en-US" smtClean="0"/>
+              <a:t>Cloud</a:t>
+            </a:r>
+            <a:endParaRPr lang="en-US" dirty="0"/>
+          </a:p>
+        </p:txBody>
+      </p:sp>
+      <p:pic>
+        <p:nvPicPr>
+          <p:cNvPr id="80898" name="Picture 2"/>
+          <p:cNvPicPr>
+            <a:picLocks noChangeAspect="1" noChangeArrowheads="1"/>
+          </p:cNvPicPr>
+          <p:nvPr/>
+        </p:nvPicPr>
+        <p:blipFill>
+          <a:blip r:embed="rId2" cstate="print"/>
+          <a:srcRect/>
+          <a:stretch>
+            <a:fillRect/>
+          </a:stretch>
+        </p:blipFill>
+        <p:spPr bwMode="auto">
+          <a:xfrm>
+            <a:off x="765175" y="2073275"/>
+            <a:ext cx="7613650" cy="3870325"/>
+          </a:xfrm>
+          <a:prstGeom prst="rect">
+            <a:avLst/>
+          </a:prstGeom>
+          <a:noFill/>
+          <a:ln w="9525">
+            <a:noFill/>
+            <a:miter lim="800000"/>
+            <a:headEnd/>
+            <a:tailEnd/>
+          </a:ln>
+        </p:spPr>
+      </p:pic>
+    </p:spTree>
+  </p:cSld>
+  <p:clrMapOvr>
+    <a:masterClrMapping/>
+  </p:clrMapOvr>
+</p:sld>
+</file>
+
+<file path=ppt/slides/slide63.xml><?xml version="1.0" encoding="utf-8"?>
 <p:sld xmlns:a="http://schemas.openxmlformats.org/drawingml/2006/main" xmlns:r="http://schemas.openxmlformats.org/officeDocument/2006/relationships" xmlns:p="http://schemas.openxmlformats.org/presentationml/2006/main">
   <p:cSld>
     <p:spTree>
@@ -10962,7 +11055,7 @@
 </p:sld>
 </file>
 
-<file path=ppt/slides/slide63.xml><?xml version="1.0" encoding="utf-8"?>
+<file path=ppt/slides/slide64.xml><?xml version="1.0" encoding="utf-8"?>
 <p:sld xmlns:a="http://schemas.openxmlformats.org/drawingml/2006/main" xmlns:r="http://schemas.openxmlformats.org/officeDocument/2006/relationships" xmlns:p="http://schemas.openxmlformats.org/presentationml/2006/main">
   <p:cSld>
     <p:spTree>
@@ -11062,7 +11155,7 @@
 </p:sld>
 </file>
 
-<file path=ppt/slides/slide64.xml><?xml version="1.0" encoding="utf-8"?>
+<file path=ppt/slides/slide65.xml><?xml version="1.0" encoding="utf-8"?>
 <p:sld xmlns:a="http://schemas.openxmlformats.org/drawingml/2006/main" xmlns:r="http://schemas.openxmlformats.org/officeDocument/2006/relationships" xmlns:p="http://schemas.openxmlformats.org/presentationml/2006/main">
   <p:cSld>
     <p:spTree>
@@ -11188,7 +11281,7 @@
 </p:sld>
 </file>
 
-<file path=ppt/slides/slide65.xml><?xml version="1.0" encoding="utf-8"?>
+<file path=ppt/slides/slide66.xml><?xml version="1.0" encoding="utf-8"?>
 <p:sld xmlns:a="http://schemas.openxmlformats.org/drawingml/2006/main" xmlns:r="http://schemas.openxmlformats.org/officeDocument/2006/relationships" xmlns:p="http://schemas.openxmlformats.org/presentationml/2006/main">
   <p:cSld>
     <p:spTree>
@@ -11300,7 +11393,7 @@
 </p:sld>
 </file>
 
-<file path=ppt/slides/slide66.xml><?xml version="1.0" encoding="utf-8"?>
+<file path=ppt/slides/slide67.xml><?xml version="1.0" encoding="utf-8"?>
 <p:sld xmlns:a="http://schemas.openxmlformats.org/drawingml/2006/main" xmlns:r="http://schemas.openxmlformats.org/officeDocument/2006/relationships" xmlns:p="http://schemas.openxmlformats.org/presentationml/2006/main">
   <p:cSld>
     <p:spTree>
